--- a/presentations/research-ddi-requirements/B08_DDI_Requirements_Narrated.pptx
+++ b/presentations/research-ddi-requirements/B08_DDI_Requirements_Narrated.pptx
@@ -191,7 +191,7 @@
     </p:spTree>
     <p:extLst>
       <p:ext uri="{BB962C8B-B14F-4D97-AF65-F5344CB8AC3E}">
-        <p14:creationId xmlns:p14="http://schemas.microsoft.com/office/powerpoint/2010/main" val="193779166"/>
+        <p14:creationId xmlns:p14="http://schemas.microsoft.com/office/powerpoint/2010/main" val="2974142386"/>
       </p:ext>
     </p:extLst>
   </p:cSld>
@@ -2722,7 +2722,7 @@
             <a:hlinkClick r:id="" action="ppaction://media"/>
             <a:extLst>
               <a:ext uri="{FF2B5EF4-FFF2-40B4-BE49-F238E27FC236}">
-                <a16:creationId xmlns:a16="http://schemas.microsoft.com/office/drawing/2014/main" id="{56A5266C-F443-EE92-A258-864C62333348}"/>
+                <a16:creationId xmlns:a16="http://schemas.microsoft.com/office/drawing/2014/main" id="{2E4B4296-A780-B616-0758-2714AAEB374D}"/>
               </a:ext>
             </a:extLst>
           </p:cNvPr>
@@ -2738,7 +2738,7 @@
                     <p:ext uri="{3AFAAA56-56D3-431D-BCD4-E75A35582382}">
                       <p173:tracksInfo xmlns:p173="http://schemas.microsoft.com/office/powerpoint/2017/3/main" displayLoc="slide">
                         <p173:trackLst>
-                          <p173:track id="{8BC77E3D-6A7C-4FA0-B4D7-47C95AE0BEB1}" label="English (captions)" lang="en-US" r:embed="rId6"/>
+                          <p173:track id="{EFF73627-2F75-4EDE-9DCC-9528D6AC373F}" label="English (captions)" lang="en-US" r:embed="rId6"/>
                         </p173:trackLst>
                       </p173:tracksInfo>
                     </p:ext>
@@ -2756,7 +2756,7 @@
         </p:blipFill>
         <p:spPr>
           <a:xfrm>
-            <a:off x="127000" y="6350000"/>
+            <a:off x="12446000" y="127000"/>
             <a:ext cx="304800" cy="304800"/>
           </a:xfrm>
           <a:prstGeom prst="rect">
@@ -3847,7 +3847,7 @@
             <a:hlinkClick r:id="" action="ppaction://media"/>
             <a:extLst>
               <a:ext uri="{FF2B5EF4-FFF2-40B4-BE49-F238E27FC236}">
-                <a16:creationId xmlns:a16="http://schemas.microsoft.com/office/drawing/2014/main" id="{BAD7FD7C-F815-A5C7-42E2-CC6D39FD070C}"/>
+                <a16:creationId xmlns:a16="http://schemas.microsoft.com/office/drawing/2014/main" id="{FDBACE08-7843-A113-9666-BF66E29D41B1}"/>
               </a:ext>
             </a:extLst>
           </p:cNvPr>
@@ -3863,7 +3863,7 @@
                     <p:ext uri="{3AFAAA56-56D3-431D-BCD4-E75A35582382}">
                       <p173:tracksInfo xmlns:p173="http://schemas.microsoft.com/office/powerpoint/2017/3/main" displayLoc="slide">
                         <p173:trackLst>
-                          <p173:track id="{4155953C-B32D-4287-9F4B-6A2119DE8ADE}" label="English (captions)" lang="en-US" r:embed="rId6"/>
+                          <p173:track id="{692502E4-E79E-4154-99B9-903FAA5E164E}" label="English (captions)" lang="en-US" r:embed="rId6"/>
                         </p173:trackLst>
                       </p173:tracksInfo>
                     </p:ext>
@@ -3881,7 +3881,7 @@
         </p:blipFill>
         <p:spPr>
           <a:xfrm>
-            <a:off x="127000" y="6350000"/>
+            <a:off x="12446000" y="127000"/>
             <a:ext cx="304800" cy="304800"/>
           </a:xfrm>
           <a:prstGeom prst="rect">
@@ -4891,7 +4891,7 @@
             <a:hlinkClick r:id="" action="ppaction://media"/>
             <a:extLst>
               <a:ext uri="{FF2B5EF4-FFF2-40B4-BE49-F238E27FC236}">
-                <a16:creationId xmlns:a16="http://schemas.microsoft.com/office/drawing/2014/main" id="{4296ADC9-5173-5B78-2F12-ADD65775AB93}"/>
+                <a16:creationId xmlns:a16="http://schemas.microsoft.com/office/drawing/2014/main" id="{BBAB6372-E455-2E32-82E8-5D67742C8EB4}"/>
               </a:ext>
             </a:extLst>
           </p:cNvPr>
@@ -4907,7 +4907,7 @@
                     <p:ext uri="{3AFAAA56-56D3-431D-BCD4-E75A35582382}">
                       <p173:tracksInfo xmlns:p173="http://schemas.microsoft.com/office/powerpoint/2017/3/main" displayLoc="slide">
                         <p173:trackLst>
-                          <p173:track id="{046C2AB2-A5D3-48FD-8E27-E6903D52EE00}" label="English (captions)" lang="en-US" r:embed="rId9"/>
+                          <p173:track id="{C0AC0C7F-54E7-488E-95D1-2EF6A0FC9509}" label="English (captions)" lang="en-US" r:embed="rId9"/>
                         </p173:trackLst>
                       </p173:tracksInfo>
                     </p:ext>
@@ -4925,7 +4925,7 @@
         </p:blipFill>
         <p:spPr>
           <a:xfrm>
-            <a:off x="127000" y="6350000"/>
+            <a:off x="12446000" y="127000"/>
             <a:ext cx="304800" cy="304800"/>
           </a:xfrm>
           <a:prstGeom prst="rect">
@@ -6429,7 +6429,7 @@
             <a:hlinkClick r:id="" action="ppaction://media"/>
             <a:extLst>
               <a:ext uri="{FF2B5EF4-FFF2-40B4-BE49-F238E27FC236}">
-                <a16:creationId xmlns:a16="http://schemas.microsoft.com/office/drawing/2014/main" id="{47F75714-EC53-55D7-D4F4-218952913DBF}"/>
+                <a16:creationId xmlns:a16="http://schemas.microsoft.com/office/drawing/2014/main" id="{1486BA47-7AD3-3DC3-FDEC-0F5D24D8751B}"/>
               </a:ext>
             </a:extLst>
           </p:cNvPr>
@@ -6445,7 +6445,7 @@
                     <p:ext uri="{3AFAAA56-56D3-431D-BCD4-E75A35582382}">
                       <p173:tracksInfo xmlns:p173="http://schemas.microsoft.com/office/powerpoint/2017/3/main" displayLoc="slide">
                         <p173:trackLst>
-                          <p173:track id="{9898C7AC-2CE2-4AB4-9594-F7AB76AAC077}" label="English (captions)" lang="en-US" r:embed="rId6"/>
+                          <p173:track id="{90E2997A-C9F6-4CB0-BE20-92A109A84037}" label="English (captions)" lang="en-US" r:embed="rId6"/>
                         </p173:trackLst>
                       </p173:tracksInfo>
                     </p:ext>
@@ -6463,7 +6463,7 @@
         </p:blipFill>
         <p:spPr>
           <a:xfrm>
-            <a:off x="127000" y="6350000"/>
+            <a:off x="12446000" y="127000"/>
             <a:ext cx="304800" cy="304800"/>
           </a:xfrm>
           <a:prstGeom prst="rect">
@@ -8613,7 +8613,7 @@
             <a:hlinkClick r:id="" action="ppaction://media"/>
             <a:extLst>
               <a:ext uri="{FF2B5EF4-FFF2-40B4-BE49-F238E27FC236}">
-                <a16:creationId xmlns:a16="http://schemas.microsoft.com/office/drawing/2014/main" id="{433B9F0B-69FE-E2F7-AB7B-7770EB904F16}"/>
+                <a16:creationId xmlns:a16="http://schemas.microsoft.com/office/drawing/2014/main" id="{5B3B5B2B-C4E1-441E-269E-09F87D545B0A}"/>
               </a:ext>
             </a:extLst>
           </p:cNvPr>
@@ -8629,7 +8629,7 @@
                     <p:ext uri="{3AFAAA56-56D3-431D-BCD4-E75A35582382}">
                       <p173:tracksInfo xmlns:p173="http://schemas.microsoft.com/office/powerpoint/2017/3/main" displayLoc="slide">
                         <p173:trackLst>
-                          <p173:track id="{36723444-EDC5-4E20-B48B-48AEFCD6CA3F}" label="English (captions)" lang="en-US" r:embed="rId6"/>
+                          <p173:track id="{6DE9E9BD-3677-4606-B74B-A416858997B9}" label="English (captions)" lang="en-US" r:embed="rId6"/>
                         </p173:trackLst>
                       </p173:tracksInfo>
                     </p:ext>
@@ -8647,7 +8647,7 @@
         </p:blipFill>
         <p:spPr>
           <a:xfrm>
-            <a:off x="127000" y="6350000"/>
+            <a:off x="12446000" y="127000"/>
             <a:ext cx="304800" cy="304800"/>
           </a:xfrm>
           <a:prstGeom prst="rect">
@@ -10000,7 +10000,7 @@
             <a:hlinkClick r:id="" action="ppaction://media"/>
             <a:extLst>
               <a:ext uri="{FF2B5EF4-FFF2-40B4-BE49-F238E27FC236}">
-                <a16:creationId xmlns:a16="http://schemas.microsoft.com/office/drawing/2014/main" id="{C4C485CC-CE23-E53D-0DB6-6176B6FBF9C7}"/>
+                <a16:creationId xmlns:a16="http://schemas.microsoft.com/office/drawing/2014/main" id="{5ADC9B1A-E1B2-7545-D6B6-CF7A6D63D8E4}"/>
               </a:ext>
             </a:extLst>
           </p:cNvPr>
@@ -10016,7 +10016,7 @@
                     <p:ext uri="{3AFAAA56-56D3-431D-BCD4-E75A35582382}">
                       <p173:tracksInfo xmlns:p173="http://schemas.microsoft.com/office/powerpoint/2017/3/main" displayLoc="slide">
                         <p173:trackLst>
-                          <p173:track id="{C6392771-CF1C-4AA3-975F-4F29B6953BC0}" label="English (captions)" lang="en-US" r:embed="rId11"/>
+                          <p173:track id="{2BC368AC-0C3E-465F-837D-DC3FD8568F7D}" label="English (captions)" lang="en-US" r:embed="rId11"/>
                         </p173:trackLst>
                       </p173:tracksInfo>
                     </p:ext>
@@ -10034,7 +10034,7 @@
         </p:blipFill>
         <p:spPr>
           <a:xfrm>
-            <a:off x="127000" y="6350000"/>
+            <a:off x="12446000" y="127000"/>
             <a:ext cx="304800" cy="304800"/>
           </a:xfrm>
           <a:prstGeom prst="rect">
@@ -12909,7 +12909,7 @@
             <a:hlinkClick r:id="" action="ppaction://media"/>
             <a:extLst>
               <a:ext uri="{FF2B5EF4-FFF2-40B4-BE49-F238E27FC236}">
-                <a16:creationId xmlns:a16="http://schemas.microsoft.com/office/drawing/2014/main" id="{F6E21A43-9C4A-695E-DFDC-20FD4E6BE56E}"/>
+                <a16:creationId xmlns:a16="http://schemas.microsoft.com/office/drawing/2014/main" id="{CF638969-443E-1E36-5EBC-53BEE35A9C72}"/>
               </a:ext>
             </a:extLst>
           </p:cNvPr>
@@ -12925,7 +12925,7 @@
                     <p:ext uri="{3AFAAA56-56D3-431D-BCD4-E75A35582382}">
                       <p173:tracksInfo xmlns:p173="http://schemas.microsoft.com/office/powerpoint/2017/3/main" displayLoc="slide">
                         <p173:trackLst>
-                          <p173:track id="{54A62F26-3A2D-40B7-A04A-ED1173086DC8}" label="English (captions)" lang="en-US" r:embed="rId6"/>
+                          <p173:track id="{D4177369-8F00-4112-A6CB-8B977DDBAB0C}" label="English (captions)" lang="en-US" r:embed="rId6"/>
                         </p173:trackLst>
                       </p173:tracksInfo>
                     </p:ext>
@@ -12943,7 +12943,7 @@
         </p:blipFill>
         <p:spPr>
           <a:xfrm>
-            <a:off x="127000" y="6350000"/>
+            <a:off x="12446000" y="127000"/>
             <a:ext cx="304800" cy="304800"/>
           </a:xfrm>
           <a:prstGeom prst="rect">
@@ -14711,7 +14711,7 @@
             <a:hlinkClick r:id="" action="ppaction://media"/>
             <a:extLst>
               <a:ext uri="{FF2B5EF4-FFF2-40B4-BE49-F238E27FC236}">
-                <a16:creationId xmlns:a16="http://schemas.microsoft.com/office/drawing/2014/main" id="{C5BA36C8-DE59-5474-6C69-AE78DE640EA3}"/>
+                <a16:creationId xmlns:a16="http://schemas.microsoft.com/office/drawing/2014/main" id="{482640F2-CE19-FFA5-62FE-74444C73B587}"/>
               </a:ext>
             </a:extLst>
           </p:cNvPr>
@@ -14727,7 +14727,7 @@
                     <p:ext uri="{3AFAAA56-56D3-431D-BCD4-E75A35582382}">
                       <p173:tracksInfo xmlns:p173="http://schemas.microsoft.com/office/powerpoint/2017/3/main" displayLoc="slide">
                         <p173:trackLst>
-                          <p173:track id="{CAE96407-1628-430A-B0EF-D03AA7FD5D20}" label="English (captions)" lang="en-US" r:embed="rId7"/>
+                          <p173:track id="{ED67E82F-3462-41DE-A431-71F3E4A18409}" label="English (captions)" lang="en-US" r:embed="rId7"/>
                         </p173:trackLst>
                       </p173:tracksInfo>
                     </p:ext>
@@ -14745,7 +14745,7 @@
         </p:blipFill>
         <p:spPr>
           <a:xfrm>
-            <a:off x="127000" y="6350000"/>
+            <a:off x="12446000" y="127000"/>
             <a:ext cx="304800" cy="304800"/>
           </a:xfrm>
           <a:prstGeom prst="rect">
@@ -15976,7 +15976,7 @@
             <a:hlinkClick r:id="" action="ppaction://media"/>
             <a:extLst>
               <a:ext uri="{FF2B5EF4-FFF2-40B4-BE49-F238E27FC236}">
-                <a16:creationId xmlns:a16="http://schemas.microsoft.com/office/drawing/2014/main" id="{C17C9164-0D12-9ACF-E5E3-5AE9475A3E59}"/>
+                <a16:creationId xmlns:a16="http://schemas.microsoft.com/office/drawing/2014/main" id="{D27D6E10-8488-3F83-B5CA-17DCA667CC46}"/>
               </a:ext>
             </a:extLst>
           </p:cNvPr>
@@ -15992,7 +15992,7 @@
                     <p:ext uri="{3AFAAA56-56D3-431D-BCD4-E75A35582382}">
                       <p173:tracksInfo xmlns:p173="http://schemas.microsoft.com/office/powerpoint/2017/3/main" displayLoc="slide">
                         <p173:trackLst>
-                          <p173:track id="{C1F6E0CF-B2CE-499F-8522-8A6D301C07F7}" label="English (captions)" lang="en-US" r:embed="rId12"/>
+                          <p173:track id="{A6827C78-517A-4F36-B51F-C50D0C42040C}" label="English (captions)" lang="en-US" r:embed="rId12"/>
                         </p173:trackLst>
                       </p173:tracksInfo>
                     </p:ext>
@@ -16010,7 +16010,7 @@
         </p:blipFill>
         <p:spPr>
           <a:xfrm>
-            <a:off x="127000" y="6350000"/>
+            <a:off x="12446000" y="127000"/>
             <a:ext cx="304800" cy="304800"/>
           </a:xfrm>
           <a:prstGeom prst="rect">
@@ -17977,7 +17977,7 @@
             <a:hlinkClick r:id="" action="ppaction://media"/>
             <a:extLst>
               <a:ext uri="{FF2B5EF4-FFF2-40B4-BE49-F238E27FC236}">
-                <a16:creationId xmlns:a16="http://schemas.microsoft.com/office/drawing/2014/main" id="{BB7B4634-4491-6E9F-8873-75AE4EDBF03F}"/>
+                <a16:creationId xmlns:a16="http://schemas.microsoft.com/office/drawing/2014/main" id="{F247ED6C-7BA0-0E6C-4AB2-6E14ADD2950D}"/>
               </a:ext>
             </a:extLst>
           </p:cNvPr>
@@ -17993,7 +17993,7 @@
                     <p:ext uri="{3AFAAA56-56D3-431D-BCD4-E75A35582382}">
                       <p173:tracksInfo xmlns:p173="http://schemas.microsoft.com/office/powerpoint/2017/3/main" displayLoc="slide">
                         <p173:trackLst>
-                          <p173:track id="{6CC155DA-30B8-4704-995F-ADF623F253B3}" label="English (captions)" lang="en-US" r:embed="rId6"/>
+                          <p173:track id="{BE7107F3-51D5-410D-9305-0CB4D40B4D95}" label="English (captions)" lang="en-US" r:embed="rId6"/>
                         </p173:trackLst>
                       </p173:tracksInfo>
                     </p:ext>
@@ -18011,7 +18011,7 @@
         </p:blipFill>
         <p:spPr>
           <a:xfrm>
-            <a:off x="127000" y="6350000"/>
+            <a:off x="12446000" y="127000"/>
             <a:ext cx="304800" cy="304800"/>
           </a:xfrm>
           <a:prstGeom prst="rect">
@@ -18737,7 +18737,7 @@
             <a:hlinkClick r:id="" action="ppaction://media"/>
             <a:extLst>
               <a:ext uri="{FF2B5EF4-FFF2-40B4-BE49-F238E27FC236}">
-                <a16:creationId xmlns:a16="http://schemas.microsoft.com/office/drawing/2014/main" id="{6328B6E5-C72C-BBC7-AD49-2E5764FB1D2A}"/>
+                <a16:creationId xmlns:a16="http://schemas.microsoft.com/office/drawing/2014/main" id="{AC1B4CEC-FA30-3FC7-1B25-E2709D9EB68F}"/>
               </a:ext>
             </a:extLst>
           </p:cNvPr>
@@ -18753,7 +18753,7 @@
                     <p:ext uri="{3AFAAA56-56D3-431D-BCD4-E75A35582382}">
                       <p173:tracksInfo xmlns:p173="http://schemas.microsoft.com/office/powerpoint/2017/3/main" displayLoc="slide">
                         <p173:trackLst>
-                          <p173:track id="{5800A087-532F-4419-BE82-24A481394AD9}" label="English (captions)" lang="en-US" r:embed="rId6"/>
+                          <p173:track id="{FC5989FD-C0F0-42A6-82A3-826747370426}" label="English (captions)" lang="en-US" r:embed="rId6"/>
                         </p173:trackLst>
                       </p173:tracksInfo>
                     </p:ext>
@@ -18771,7 +18771,7 @@
         </p:blipFill>
         <p:spPr>
           <a:xfrm>
-            <a:off x="127000" y="6350000"/>
+            <a:off x="12446000" y="127000"/>
             <a:ext cx="304800" cy="304800"/>
           </a:xfrm>
           <a:prstGeom prst="rect">
@@ -20134,7 +20134,7 @@
             <a:hlinkClick r:id="" action="ppaction://media"/>
             <a:extLst>
               <a:ext uri="{FF2B5EF4-FFF2-40B4-BE49-F238E27FC236}">
-                <a16:creationId xmlns:a16="http://schemas.microsoft.com/office/drawing/2014/main" id="{B70B33E0-D30E-46AC-32C0-4E77CB9A7485}"/>
+                <a16:creationId xmlns:a16="http://schemas.microsoft.com/office/drawing/2014/main" id="{38CC53AD-52F0-8B1E-92CC-F4A401A0773B}"/>
               </a:ext>
             </a:extLst>
           </p:cNvPr>
@@ -20150,7 +20150,7 @@
                     <p:ext uri="{3AFAAA56-56D3-431D-BCD4-E75A35582382}">
                       <p173:tracksInfo xmlns:p173="http://schemas.microsoft.com/office/powerpoint/2017/3/main" displayLoc="slide">
                         <p173:trackLst>
-                          <p173:track id="{4EB83C68-B424-43A5-BA48-E25E6EA847FF}" label="English (captions)" lang="en-US" r:embed="rId6"/>
+                          <p173:track id="{D6D9B90E-A5A1-4787-9977-82F214437E21}" label="English (captions)" lang="en-US" r:embed="rId6"/>
                         </p173:trackLst>
                       </p173:tracksInfo>
                     </p:ext>
@@ -20168,7 +20168,7 @@
         </p:blipFill>
         <p:spPr>
           <a:xfrm>
-            <a:off x="127000" y="6350000"/>
+            <a:off x="12446000" y="127000"/>
             <a:ext cx="304800" cy="304800"/>
           </a:xfrm>
           <a:prstGeom prst="rect">
@@ -20930,7 +20930,7 @@
             <a:hlinkClick r:id="" action="ppaction://media"/>
             <a:extLst>
               <a:ext uri="{FF2B5EF4-FFF2-40B4-BE49-F238E27FC236}">
-                <a16:creationId xmlns:a16="http://schemas.microsoft.com/office/drawing/2014/main" id="{A55F6C38-C34D-4D99-2324-664F9D183646}"/>
+                <a16:creationId xmlns:a16="http://schemas.microsoft.com/office/drawing/2014/main" id="{09F3A2E8-EE9D-095B-0DD1-6A21DA46227C}"/>
               </a:ext>
             </a:extLst>
           </p:cNvPr>
@@ -20946,7 +20946,7 @@
                     <p:ext uri="{3AFAAA56-56D3-431D-BCD4-E75A35582382}">
                       <p173:tracksInfo xmlns:p173="http://schemas.microsoft.com/office/powerpoint/2017/3/main" displayLoc="slide">
                         <p173:trackLst>
-                          <p173:track id="{BD190462-A0F1-4A27-B435-CFF61A384246}" label="English (captions)" lang="en-US" r:embed="rId6"/>
+                          <p173:track id="{CF86B3D9-498E-4023-B2F0-0B2C328680D5}" label="English (captions)" lang="en-US" r:embed="rId6"/>
                         </p173:trackLst>
                       </p173:tracksInfo>
                     </p:ext>
@@ -20964,7 +20964,7 @@
         </p:blipFill>
         <p:spPr>
           <a:xfrm>
-            <a:off x="127000" y="6350000"/>
+            <a:off x="12446000" y="127000"/>
             <a:ext cx="304800" cy="304800"/>
           </a:xfrm>
           <a:prstGeom prst="rect">
@@ -21690,7 +21690,7 @@
             <a:hlinkClick r:id="" action="ppaction://media"/>
             <a:extLst>
               <a:ext uri="{FF2B5EF4-FFF2-40B4-BE49-F238E27FC236}">
-                <a16:creationId xmlns:a16="http://schemas.microsoft.com/office/drawing/2014/main" id="{1E21BA41-3CA4-EB07-7AFC-4AC0A80F0794}"/>
+                <a16:creationId xmlns:a16="http://schemas.microsoft.com/office/drawing/2014/main" id="{642E938A-41D7-A687-9651-DDEF2092CCF1}"/>
               </a:ext>
             </a:extLst>
           </p:cNvPr>
@@ -21706,7 +21706,7 @@
                     <p:ext uri="{3AFAAA56-56D3-431D-BCD4-E75A35582382}">
                       <p173:tracksInfo xmlns:p173="http://schemas.microsoft.com/office/powerpoint/2017/3/main" displayLoc="slide">
                         <p173:trackLst>
-                          <p173:track id="{0FB6B494-DABA-40FB-A227-5D9A8A0C756F}" label="English (captions)" lang="en-US" r:embed="rId6"/>
+                          <p173:track id="{C7871FE3-55A6-468D-8833-2A47F4162500}" label="English (captions)" lang="en-US" r:embed="rId6"/>
                         </p173:trackLst>
                       </p173:tracksInfo>
                     </p:ext>
@@ -21724,7 +21724,7 @@
         </p:blipFill>
         <p:spPr>
           <a:xfrm>
-            <a:off x="127000" y="6350000"/>
+            <a:off x="12446000" y="127000"/>
             <a:ext cx="304800" cy="304800"/>
           </a:xfrm>
           <a:prstGeom prst="rect">
@@ -23281,7 +23281,7 @@
             <a:hlinkClick r:id="" action="ppaction://media"/>
             <a:extLst>
               <a:ext uri="{FF2B5EF4-FFF2-40B4-BE49-F238E27FC236}">
-                <a16:creationId xmlns:a16="http://schemas.microsoft.com/office/drawing/2014/main" id="{49CF16A4-9A97-2A32-3BE6-264B771E890A}"/>
+                <a16:creationId xmlns:a16="http://schemas.microsoft.com/office/drawing/2014/main" id="{6F3ED002-489C-D3BA-67DA-CD36CE35FF6C}"/>
               </a:ext>
             </a:extLst>
           </p:cNvPr>
@@ -23297,7 +23297,7 @@
                     <p:ext uri="{3AFAAA56-56D3-431D-BCD4-E75A35582382}">
                       <p173:tracksInfo xmlns:p173="http://schemas.microsoft.com/office/powerpoint/2017/3/main" displayLoc="slide">
                         <p173:trackLst>
-                          <p173:track id="{7447CBC6-4CD4-45D9-A769-67FEC2C42A44}" label="English (captions)" lang="en-US" r:embed="rId6"/>
+                          <p173:track id="{CD053D9A-1E82-4674-BB80-027F29280453}" label="English (captions)" lang="en-US" r:embed="rId6"/>
                         </p173:trackLst>
                       </p173:tracksInfo>
                     </p:ext>
@@ -23315,7 +23315,7 @@
         </p:blipFill>
         <p:spPr>
           <a:xfrm>
-            <a:off x="127000" y="6350000"/>
+            <a:off x="12446000" y="127000"/>
             <a:ext cx="304800" cy="304800"/>
           </a:xfrm>
           <a:prstGeom prst="rect">
@@ -25913,7 +25913,7 @@
             <a:hlinkClick r:id="" action="ppaction://media"/>
             <a:extLst>
               <a:ext uri="{FF2B5EF4-FFF2-40B4-BE49-F238E27FC236}">
-                <a16:creationId xmlns:a16="http://schemas.microsoft.com/office/drawing/2014/main" id="{EB479716-74E9-FEDB-2311-2942391127F7}"/>
+                <a16:creationId xmlns:a16="http://schemas.microsoft.com/office/drawing/2014/main" id="{C865114D-EDB9-8052-F707-A6F8DF68363E}"/>
               </a:ext>
             </a:extLst>
           </p:cNvPr>
@@ -25929,7 +25929,7 @@
                     <p:ext uri="{3AFAAA56-56D3-431D-BCD4-E75A35582382}">
                       <p173:tracksInfo xmlns:p173="http://schemas.microsoft.com/office/powerpoint/2017/3/main" displayLoc="slide">
                         <p173:trackLst>
-                          <p173:track id="{C2D9BD32-D910-4701-8BC2-6E7C0F23A565}" label="English (captions)" lang="en-US" r:embed="rId7"/>
+                          <p173:track id="{F915E360-D1AA-4ACD-86D6-AD0E8C577A46}" label="English (captions)" lang="en-US" r:embed="rId7"/>
                         </p173:trackLst>
                       </p173:tracksInfo>
                     </p:ext>
@@ -25947,7 +25947,7 @@
         </p:blipFill>
         <p:spPr>
           <a:xfrm>
-            <a:off x="127000" y="6350000"/>
+            <a:off x="12446000" y="127000"/>
             <a:ext cx="304800" cy="304800"/>
           </a:xfrm>
           <a:prstGeom prst="rect">

--- a/presentations/research-ddi-requirements/B08_DDI_Requirements_Narrated.pptx
+++ b/presentations/research-ddi-requirements/B08_DDI_Requirements_Narrated.pptx
@@ -122,14 +122,14 @@
   <p:extLst>
     <p:ext uri="{521415D9-36F7-43E2-AB2F-B90AF26B5E84}">
       <p14:sectionLst xmlns:p14="http://schemas.microsoft.com/office/powerpoint/2010/main">
-        <p14:section name="Why the name layer is a control plane" id="{B6B2C79F-E8A2-45E9-03E2-418E9A32AE44}">
+        <p14:section name="Why the name layer is a control plane" id="{E50A8412-428F-B105-E044-76C9EEBB039A}">
           <p14:sldIdLst>
             <p14:sldId id="256"/>
             <p14:sldId id="257"/>
             <p14:sldId id="258"/>
           </p14:sldIdLst>
         </p14:section>
-        <p14:section name="What a platform must deliver" id="{20FE3F66-4C3D-0571-85F9-11D8C1DF46CC}">
+        <p14:section name="What a platform must deliver" id="{E480D18E-78DD-502B-BA98-81AA58489B31}">
           <p14:sldIdLst>
             <p14:sldId id="259"/>
             <p14:sldId id="260"/>
@@ -139,7 +139,7 @@
             <p14:sldId id="264"/>
           </p14:sldIdLst>
         </p14:section>
-        <p14:section name="Who runs it, and divisions" id="{E0227485-CB51-536C-B37E-1FEB6FB0A57B}">
+        <p14:section name="Who runs it, and divisions" id="{C1FA2363-9AFF-7C4B-A59C-651F0F1EDA7E}">
           <p14:sldIdLst>
             <p14:sldId id="265"/>
             <p14:sldId id="266"/>
@@ -149,12 +149,12 @@
             <p14:sldId id="270"/>
           </p14:sldIdLst>
         </p14:section>
-        <p14:section name="How to decide" id="{888659AE-5509-696E-3A53-0E8C9C756B9D}">
+        <p14:section name="How to decide" id="{32CC6F66-578F-0D3F-EB36-FDD6F6C7BEF1}">
           <p14:sldIdLst>
             <p14:sldId id="271"/>
           </p14:sldIdLst>
         </p14:section>
-        <p14:section name="Backup" id="{A3EC8445-FE57-D606-3833-294A38223EBF}">
+        <p14:section name="Backup" id="{4A2731B4-561B-5373-83B3-F71E4A2C70B4}">
           <p14:sldIdLst/>
         </p14:section>
       </p14:sectionLst>
@@ -191,7 +191,7 @@
     </p:spTree>
     <p:extLst>
       <p:ext uri="{BB962C8B-B14F-4D97-AF65-F5344CB8AC3E}">
-        <p14:creationId xmlns:p14="http://schemas.microsoft.com/office/powerpoint/2010/main" val="2974142386"/>
+        <p14:creationId xmlns:p14="http://schemas.microsoft.com/office/powerpoint/2010/main" val="625807477"/>
       </p:ext>
     </p:extLst>
   </p:cSld>
@@ -340,7 +340,7 @@
               <a:t>[0:00–0:57]  This briefing is a companion to Book 08 of the Federal Modernization Workbook: DNS, DHCP and IPAM. If an agency is going to buy or build a platform for its name and address layer, what does that platform actually have to do?
 Four parts. Why the name and address layer is now a control plane, and what federal rules ask of it. What a platform has to deliver, and what to check before buying one. Who runs it, including how divisions can manage their own DNS, DHCP and IPAM under central governance. And how to decide.
 Vendors appear on these slides only as examples. Nothing here recommends or ranks a product, and the status facts carry a date, because they change. Every claim comes from Book 08 or from primary sources checked in October 2026.
-Workbook: Book 08, index; Chapters 01, 03, 08, 09, 11 and 12. Product status facts: primary sources checked October 22, 2026 (FedRAMP Marketplace data, NIST CMVP, NIAP Product Compliant List, DISA STIG file store, CISA, OMB, vendor documentation), listed in the backup section.</a:t>
+Workbook: Book 08, index; Chapters 01, 03, 08, 09, 11 and 12. Product status facts: primary sources checked October 22, 2026 (FedRAMP Marketplace data, NIST CMVP, NIAP Product Compliant List, DISA STIG file store, CISA, OMB, vendor documentation), listed in the backup section; CIS Benchmarks list, NIST National Checklist Program and NIST SP 800-53 CM-6 read October 29, 2026.</a:t>
             </a:r>
           </a:p>
         </p:txBody>
@@ -427,7 +427,7 @@
           <a:p>
             <a:r>
               <a:rPr lang="en-US" dirty="0"/>
-              <a:t>[14:15–16:01]  Now the question many agencies care about most: can divisions run their own DNS, DHCP and IPAM without breaking central governance? Book 08 says yes, if the platform supports a specific model. Corporate administrators see everything. Each division gets a scope limited to its own zones, address blocks and DHCP scopes, with predefined manager, operator and auditor roles, and automation accounts held to the same scope.
+              <a:t>[14:58–16:44]  Now the question many agencies care about most: can divisions run their own DNS, DHCP and IPAM without breaking central governance? Book 08 says yes, if the platform supports a specific model. Corporate administrators see everything. Each division gets a scope limited to its own zones, address blocks and DHCP scopes, with predefined manager, operator and auditor roles, and automation accounts held to the same scope.
 As an example, in Infoblox NIOS every resource is denied by default. A division's administrator group gets read-write on its own address block, which cascades to its networks, ranges and reservations; read-write on its own zones, with read-only on the parent view; and DNS and DHCP permissions, including service restarts, on its own servers only. One setting matters: it makes address and pointer records need rights on both the zone and the address block, so a division with access to a shared zone can't point a name into another division's space. And only central superusers create groups, roles and tag definitions, so a division can't widen its own rights.
 Administrators must prove who they are. Expect PIV and CAC certificate login checked against OCSP, and SAML single sign-on where the identity provider's group decides the user's division. In NIOS, group names must match exactly and the first match wins, so order the mappings deliberately. Keep a local break-glass administrator.
 And check automation scoping in the product you're evaluating. In Universal DDI, service users can't sign in to a divisional access view with API keys.
@@ -518,7 +518,7 @@
           <a:p>
             <a:r>
               <a:rPr lang="en-US" dirty="0"/>
-              <a:t>[16:01–17:38]  Three constructs keep divisions apart.
+              <a:t>[16:44–18:21]  Three constructs keep divisions apart.
 First, separate address spaces. When a lab's private range overlaps headquarters and renumbering isn't practical, IPAM needs a separate routing domain, so the same addresses can exist twice. Infoblox calls these network views; Universal DDI uses IP spaces. Two consequences follow. In NIOS, a DHCP server serves only one network view, so a division with overlapping space needs its own DHCP servers. And NIOS doesn't enforce uniqueness across views; Universal DDI's IPAM Federation does, recording which blocks are globally unique, which are delegated, and which overlap deliberately behind NAT.
 Second, DNS views, which give different answers to different clients by source address or key. The first matching view wins, so an external catch-all placed first hides the internal view. Cloud services have their own versions; an Azure private zone answers only the networks linked to it.
 Third, tags for ownership: division, cost center, site. Infoblox calls them extensible attributes; Universal DDI calls them tags. They drive filtering and reports, not permissions. And a required tag is enforced only in the graphical interface. Objects created through the API or a CSV import can skip it, so the automation has to enforce the division tag itself.
@@ -610,7 +610,7 @@
           <a:p>
             <a:r>
               <a:rPr lang="en-US" dirty="0"/>
-              <a:t>[17:38–19:08]  Delegation needs change control, and the useful pattern is an approval workflow. A division's group submits a change, with a ticket number required. A central approver group approves, rejects or reschedules it. The task then runs with the submitter's own permissions, so approval can't grant rights the division doesn't have, and it lands in the audit log with a task identifier. That's NIOS; a Universal DDI equivalent wasn't confirmed, so ask.
+              <a:t>[18:21–19:51]  Delegation needs change control, and the useful pattern is an approval workflow. A division's group submits a change, with a ticket number required. A central approver group approves, rejects or reschedules it. The task then runs with the submitter's own permissions, so approval can't grant rights the division doesn't have, and it lands in the audit log with a task identifier. That's NIOS; a Universal DDI equivalent wasn't confirmed, so ask.
 The weakness of any workflow is what goes around it. In NIOS, CSV imports don't require approval at all, and the console warns when a submitter group holds import permission; remove it from every division group. Service restarts aren't subject to approval either. Some operations are blocked for submitters even when they hold the permission: signing or unsigning zones, key-signing key rollovers, resizing or splitting networks, and bulk edits. And a zone delegated to a division's own servers leaves the platform entirely: its changes, its response policy and its signing.
 So decide what stays central in every pattern. The superuser accounts, and the definitions of groups, roles and tags. The approval workflows and the authentication policy. DNSSEC keys and signing. Security policy, meaning response policy zones and threat feeds. The top-level address blocks. And logging, with the platform-wide DNS and DHCP settings.
 Workbook: Book 08, Chapter 09 — Who Owns DNS, DHCP and IPAM (The responsibility matrix; Record change approval), Chapter 11 (Delegated administration across divisions) — with verified research beyond the book: Infoblox NIOS admin guide pages "Creating Approval Workflows", "Unsupported Operations for Submitters", "Supported Tasks for Different Admin Groups", "Scheduling Tasks", "Audit Log", "Configuring a Delegation", checked October 22, 2026.</a:t>
@@ -700,7 +700,7 @@
           <a:p>
             <a:r>
               <a:rPr lang="en-US" dirty="0"/>
-              <a:t>[19:08–20:43]  Those pieces make four delegation patterns, each with a cost. They're drawn from Infoblox's documentation but apply to any comparable platform.
+              <a:t>[19:51–21:26]  Those pieces make four delegation patterns, each with a cost. They're drawn from Infoblox's documentation but apply to any comparable platform.
 Pattern A: one central platform with delegated division administrator groups. You get one database, one audit log, and one DNSSEC and response-policy posture, with everything denied by default. The risks are permission sprawl, first-match ordering surprises when roles overlap, the import bypass, and reports that ignore permissions.
 Pattern B: division-owned servers inside the central platform. The division gets local resilience and can restart its own services, confined to its own servers. But it can't change platform-wide settings, and signed zones still have a central hidden primary, because in NIOS only the Grid Master can be primary for a signed zone.
 Pattern C: a separate network view or IP space per division. It's the only way to hold overlapping private address space, and it draws a clean visibility boundary. It needs dedicated DHCP servers per view, and uniqueness across views needs federation.
@@ -793,7 +793,7 @@
           <a:p>
             <a:r>
               <a:rPr lang="en-US" dirty="0"/>
-              <a:t>[20:43–22:20]  Here's an illustrative design, not a validated configuration, for an agency that owns ten dot zero slash eight and example dot gov, with four divisions.
+              <a:t>[21:26–23:03]  Here's an illustrative design, not a validated configuration, for an agency that owns ten dot zero slash eight and example dot gov, with four divisions.
 Headquarters is the central network operations team. It holds its own slash-twelve block and its own zone under pattern A, and it hosts the central superusers and a read-only approver group. If example dot gov is signed, the central management node signs it as hidden primary.
 The law-enforcement bureau needs confidentiality from the other divisions. It gets its own block and its own zone, served from its own two servers, patterns A and B, and nothing else, because everything else stays denied. Its data stays out of shared dashboards. If its change detail shouldn't reach headquarters approvers, a bureau-lead approver group can own its workflow.
 The regional office still runs Windows DNS and DHCP. The platform manages those servers, and the region's group gets rights on them only, never the platform-wide DNS and DHCP administrator roles. Each server's network view is fixed at first sync.
@@ -885,7 +885,7 @@
           <a:p>
             <a:r>
               <a:rPr lang="en-US" dirty="0"/>
-              <a:t>[22:20–23:58]  Who decides all this? Book 08's Chapter 09 gives one decider per row, and separates deciding from doing.
+              <a:t>[23:03–24:41]  Who decides all this? Book 08's Chapter 09 gives one decider per row, and separates deciding from doing.
 The sponsor and CIO decide the platform and its deployment model, with the DNS/DDI team doing the evaluation and the CISO, the authorizing official and the operating teams consulted. They also decide how divisions are scoped, and break ties over the resolver path.
 The authorizing official decides whether a cloud-delivered management plane is authorized for the agency's use, and accepts the standing exceptions: an internal zone that loses DNSSEC in its new home, or an encrypted DNS exception that has outlived the agency's limit.
 The CISO and ISSO set the control requirements: DNSSEC signing of public zones and validation on agency resolvers, encrypted DNS policy, and Protective DNS forwarding and query logging.
@@ -978,10 +978,10 @@
           <a:p>
             <a:r>
               <a:rPr lang="en-US" dirty="0"/>
-              <a:t>[23:58–25:30]  So, the decisions and the next steps.
+              <a:t>[24:41–26:16]  So, the decisions and the next steps.
 First, the sponsor and CIO authorize one authoritative DDI policy plane, and the DNS/DDI team settles Book 08's five configuration decisions within 90 days and reports the residual risk to the authorizing official. That's the book's ask.
 Second, write the requirement as capabilities, each mapped to the rule behind it: signing and validation, encrypted DNS, Protective DNS forwarding, discovery and inventory, IPv6, logging retention. No rule names a product, so the solicitation shouldn't either.
-Third, request the same evidence pack from every candidate: the FedRAMP listing and exactly what its scope covers, the STIG, an active FIPS 140-3 certificate, Common Criteria status, the advisory response commitment, and a three-to-five-year cost on the same assumptions. Record every gap with an owner.
+Third, request the same evidence pack from every candidate: the FedRAMP listing and exactly what its scope covers, the hardening guidance the agency's settings will come from, an active FIPS 140-3 certificate, Common Criteria status, the advisory response commitment, and a three-to-five-year cost on the same assumptions. Record every gap with an owner.
 Fourth, choose a delegation pattern for each division, write down what stays central, and pilot it with one division, ideally one with overlapping address space, because that's where the design gets tested.
 Fifth, the CISO sizes logging to M-26-14's retention, and tests it at peak query rates and with the SIEM down.
 The next step needs no award. List every DNS, DHCP and IPAM requirement your systems inherit, the capability each needs, and the evidence that would prove it. Book 08 has the detail, with every claim footnoted. Thank you.
@@ -1617,11 +1617,11 @@
           <a:p>
             <a:r>
               <a:rPr lang="en-US" dirty="0"/>
-              <a:t>[10:55–12:37]  Before buying any DDI product, check the evidence an assessor will ask for, not the feature list.
+              <a:t>[10:55–13:08]  Before buying any DDI product, check the evidence an assessor will ask for, not the feature list.
 Start with FedRAMP, and read the listing's scope, not just its badge. FedRAMP certifies a specific cloud service offering. A SaaS management plane needs a certification at the right level, and the agency still authorizes its own DDI system. Software and appliances the agency runs aren't covered by any listing; they sit inside the agency's own boundary. And a Moderate certification doesn't cover High or DoD workloads.
-Then the security baselines. Especially for DoD systems, ask whether DISA publishes a vendor-specific STIG, or whether only the generic DNS security requirements guide applies. Ask for an active FIPS 140-3 certificate, and look up its status yourself. FIPS 140-2 certificates moved to NIST's historical list on September 21, 2026, and historical modules may be used for existing systems only. So a new deployment that relies on validated cryptography can't cite a historical certificate. Ask about NIAP. And know that CISA's CDM Approved Products List isn't accepting new submissions; the latest list is from April 2025.
+Then the hardening baseline. The agency writes its own configuration settings for the product, under NIST SP 800-53 control CM-6, so ask what they can be written from: a CIS Benchmark, the vendor's own hardening guide, or a checklist in NIST's National Checklist Program. A vendor-specific DISA STIG, or the generic DNS security requirements guide, is High only, Defense material, though a civilian agency may borrow one when it's the only published checklist for a product. High only marks material that applies to FedRAMP High or Defense environments, not to the Moderate civilian baseline this workbook targets. Ask for an active FIPS 140-3 certificate, and look up its status yourself. FIPS 140-2 certificates moved to NIST's historical list on September 21, 2026, and historical modules may be used for existing systems only. So a new deployment that relies on validated cryptography can't cite a historical certificate. Ask about NIAP. And know that CISA's CDM Approved Products List isn't accepting new submissions; the latest list is from April 2025.
 Advisory response: does the vendor track the open-source DNS code underneath? CISA added an old BIND vulnerability to its Known Exploited Vulnerabilities catalog on October 8, 2026. And licensing: know what's metered. Azure's DNS Private Resolver bills 180 dollars a month per endpoint at list price; one DDI vendor's SaaS uses subscription tokens that expire at term end. Model three to five years.
-Workbook: Book 08, Chapter 03 (FedRAMP and agency authorization), Chapter 12 — Platform Selection, Cost and Residual Risk (What the cloud-native path meters; Selection criteria; Authorization status, as the Marketplace shows it) — with verified research beyond the book: NIST CMVP program and FIPS 140-3 transition pages (140-2 certificates historical September 21, 2026; "existing systems only"); NIAP PCL; DISA STIG file store and DNS SRG V4R3; CISA CDM APL page (not accepting new submissions; April 2025 list); CISA KEV catalog 2026.10.21 (CVE-2015-5477 added October 8, 2026); Infoblox Universal DDI tokens FAQ (vendor), checked October 22, 2026.</a:t>
+Workbook: Book 08, Chapter 03 (FedRAMP and agency authorization), Chapter 12 — Platform Selection, Cost and Residual Risk (What the cloud-native path meters; Selection criteria; Authorization status, as the Marketplace shows it) — with verified research beyond the book: NIST CMVP program and FIPS 140-3 transition pages (140-2 certificates historical September 21, 2026; "existing systems only"); NIAP PCL; Center for Internet Security, CIS Benchmarks list (no NIOS benchmark), NIST SP 800-70 Rev. 5 and the National Checklist Program, and NIST SP 800-53 Rev. 5 CM-6, read October 29, 2026; DISA STIG file store and DNS SRG V4R3 (High only reference); CISA CDM APL page (not accepting new submissions; April 2025 list); CISA KEV catalog 2026.10.21 (CVE-2015-5477 added October 8, 2026); Infoblox Universal DDI tokens FAQ (vendor), checked October 22, 2026.</a:t>
             </a:r>
           </a:p>
         </p:txBody>
@@ -1708,13 +1708,13 @@
           <a:p>
             <a:r>
               <a:rPr lang="en-US" dirty="0"/>
-              <a:t>[12:37–14:15]  Here's what those checks returned for four DDI products on October 22, 2026. It's a status snapshot, not a ranking, and any cell can change, so confirm on the day you decide.
+              <a:t>[13:08–14:58]  Here's what those checks returned for four DDI products on October 22, 2026. It's a status snapshot, not a ranking, and any cell can change, so confirm on the day you decide.
 FedRAMP. One of the four has a listing: Infoblox Government Cloud, Certified at Class C, Moderate, as SaaS in AWS GovCloud, with one agency authorization. It covers the SaaS, not on-premises NIOS appliances. BlueCat, EfficientIP and Micetro have no listing. Their products run as software or appliances inside the agency's own boundary, where the agency's authorization covers them.
-STIGs. DISA publishes vendor-specific STIGs for Infoblox: NIOS 9.x, version 1 release 1, and the 8.x DNS STIG, version 1 release 4. None was found for the other three.
+STIGs, a High only reference. DISA publishes vendor-specific STIGs for Infoblox: NIOS 9.x, version 1 release 1, and the 8.x DNS STIG, version 1 release 4. None was found for the other three. There's no CIS Benchmark for NIOS, so for Infoblox the STIG is the only product-specific checklist, useful as a cross-check on the agency's own settings.
 FIPS 140. BlueCat holds an active FIPS 140-3 certificate, number 5506, a Level 1 software module that sunsets in August 2029. Infoblox's FIPS 140-2 certificates are now historical, and four FIPS 140-3 modules are in NIST's review queue. No certificate was found for EfficientIP or Micetro, and it wasn't verified whether BlueCat's certificate covers Micetro.
 NIAP. None of the four has a current certification. Infoblox's NIOS 9.0 is in evaluation, and BlueCat's entries are archived. And none appears on the April 2025 CDM list.
-So every candidate has a gap to close, in the contract or in a plan of action and milestones, whether that's an authorization, a STIG or a validated module.
-Workbook: Book 08, Chapter 12 (Authorization status, as the Marketplace shows it), Chapter 03 (FedRAMP and agency authorization) — with verified research beyond the book: FedRAMP products.json (meta last_change October 22, 2026; FR2017257053); NIST CMVP certificates #5506, #4692, #4535, #4531, #3332, #3330 and the Modules In Process list; NIAP Product Compliant List API; Common Criteria Portal certified and archived CSVs; DISA STIG file store (U_Infoblox_NIOS_9-x_V1R1_STIG, U_IB_8-x_DNS_V1R4_STIG); CISA CDM APL April 2025, all checked October 22, 2026.</a:t>
+So every candidate has a gap to close, in the contract or in a plan of action and milestones, whether that's an authorization, a hardening checklist or a validated module.
+Workbook: Book 08, Chapter 12 (Authorization status, as the Marketplace shows it), Chapter 03 (FedRAMP and agency authorization) — with verified research beyond the book: FedRAMP products.json (meta last_change October 22, 2026; FR2017257053); NIST CMVP certificates #5506, #4692, #4535, #4531, #3332, #3330 and the Modules In Process list; NIAP Product Compliant List API; Common Criteria Portal certified and archived CSVs; DISA STIG file store (U_Infoblox_NIOS_9-x_V1R1_STIG, U_IB_8-x_DNS_V1R4_STIG; High only reference); CIS Benchmarks list, accessed October 29, 2026; CISA CDM APL April 2025, all checked October 22, 2026.</a:t>
             </a:r>
           </a:p>
         </p:txBody>
@@ -2722,7 +2722,7 @@
             <a:hlinkClick r:id="" action="ppaction://media"/>
             <a:extLst>
               <a:ext uri="{FF2B5EF4-FFF2-40B4-BE49-F238E27FC236}">
-                <a16:creationId xmlns:a16="http://schemas.microsoft.com/office/drawing/2014/main" id="{2E4B4296-A780-B616-0758-2714AAEB374D}"/>
+                <a16:creationId xmlns:a16="http://schemas.microsoft.com/office/drawing/2014/main" id="{2DB8187C-76DA-8A03-7434-5F29D5FA4C90}"/>
               </a:ext>
             </a:extLst>
           </p:cNvPr>
@@ -2738,7 +2738,7 @@
                     <p:ext uri="{3AFAAA56-56D3-431D-BCD4-E75A35582382}">
                       <p173:tracksInfo xmlns:p173="http://schemas.microsoft.com/office/powerpoint/2017/3/main" displayLoc="slide">
                         <p173:trackLst>
-                          <p173:track id="{EFF73627-2F75-4EDE-9DCC-9528D6AC373F}" label="English (captions)" lang="en-US" r:embed="rId6"/>
+                          <p173:track id="{8B34D5DD-FAD3-444E-B4F7-975CB78691E2}" label="English (captions)" lang="en-US" r:embed="rId6"/>
                         </p173:trackLst>
                       </p173:tracksInfo>
                     </p:ext>
@@ -3847,7 +3847,7 @@
             <a:hlinkClick r:id="" action="ppaction://media"/>
             <a:extLst>
               <a:ext uri="{FF2B5EF4-FFF2-40B4-BE49-F238E27FC236}">
-                <a16:creationId xmlns:a16="http://schemas.microsoft.com/office/drawing/2014/main" id="{FDBACE08-7843-A113-9666-BF66E29D41B1}"/>
+                <a16:creationId xmlns:a16="http://schemas.microsoft.com/office/drawing/2014/main" id="{89BDED6C-3F75-2B22-C206-B936B0116B2C}"/>
               </a:ext>
             </a:extLst>
           </p:cNvPr>
@@ -3863,7 +3863,7 @@
                     <p:ext uri="{3AFAAA56-56D3-431D-BCD4-E75A35582382}">
                       <p173:tracksInfo xmlns:p173="http://schemas.microsoft.com/office/powerpoint/2017/3/main" displayLoc="slide">
                         <p173:trackLst>
-                          <p173:track id="{692502E4-E79E-4154-99B9-903FAA5E164E}" label="English (captions)" lang="en-US" r:embed="rId6"/>
+                          <p173:track id="{883D0C0D-54A9-4E91-9476-9E41F08C1DF8}" label="English (captions)" lang="en-US" r:embed="rId6"/>
                         </p173:trackLst>
                       </p173:tracksInfo>
                     </p:ext>
@@ -4891,7 +4891,7 @@
             <a:hlinkClick r:id="" action="ppaction://media"/>
             <a:extLst>
               <a:ext uri="{FF2B5EF4-FFF2-40B4-BE49-F238E27FC236}">
-                <a16:creationId xmlns:a16="http://schemas.microsoft.com/office/drawing/2014/main" id="{BBAB6372-E455-2E32-82E8-5D67742C8EB4}"/>
+                <a16:creationId xmlns:a16="http://schemas.microsoft.com/office/drawing/2014/main" id="{992B9405-2B8D-A23B-64D9-0AA9E8F735C9}"/>
               </a:ext>
             </a:extLst>
           </p:cNvPr>
@@ -4907,7 +4907,7 @@
                     <p:ext uri="{3AFAAA56-56D3-431D-BCD4-E75A35582382}">
                       <p173:tracksInfo xmlns:p173="http://schemas.microsoft.com/office/powerpoint/2017/3/main" displayLoc="slide">
                         <p173:trackLst>
-                          <p173:track id="{C0AC0C7F-54E7-488E-95D1-2EF6A0FC9509}" label="English (captions)" lang="en-US" r:embed="rId9"/>
+                          <p173:track id="{FA7E62B8-2099-4C7B-8920-6089CD572A32}" label="English (captions)" lang="en-US" r:embed="rId9"/>
                         </p173:trackLst>
                       </p173:tracksInfo>
                     </p:ext>
@@ -6429,7 +6429,7 @@
             <a:hlinkClick r:id="" action="ppaction://media"/>
             <a:extLst>
               <a:ext uri="{FF2B5EF4-FFF2-40B4-BE49-F238E27FC236}">
-                <a16:creationId xmlns:a16="http://schemas.microsoft.com/office/drawing/2014/main" id="{1486BA47-7AD3-3DC3-FDEC-0F5D24D8751B}"/>
+                <a16:creationId xmlns:a16="http://schemas.microsoft.com/office/drawing/2014/main" id="{9FC32668-9CF5-8EBA-C849-AC99022C2A5A}"/>
               </a:ext>
             </a:extLst>
           </p:cNvPr>
@@ -6445,7 +6445,7 @@
                     <p:ext uri="{3AFAAA56-56D3-431D-BCD4-E75A35582382}">
                       <p173:tracksInfo xmlns:p173="http://schemas.microsoft.com/office/powerpoint/2017/3/main" displayLoc="slide">
                         <p173:trackLst>
-                          <p173:track id="{90E2997A-C9F6-4CB0-BE20-92A109A84037}" label="English (captions)" lang="en-US" r:embed="rId6"/>
+                          <p173:track id="{678013A7-9918-4F0E-9661-D6950889DA4E}" label="English (captions)" lang="en-US" r:embed="rId6"/>
                         </p173:trackLst>
                       </p173:tracksInfo>
                     </p:ext>
@@ -8613,7 +8613,7 @@
             <a:hlinkClick r:id="" action="ppaction://media"/>
             <a:extLst>
               <a:ext uri="{FF2B5EF4-FFF2-40B4-BE49-F238E27FC236}">
-                <a16:creationId xmlns:a16="http://schemas.microsoft.com/office/drawing/2014/main" id="{5B3B5B2B-C4E1-441E-269E-09F87D545B0A}"/>
+                <a16:creationId xmlns:a16="http://schemas.microsoft.com/office/drawing/2014/main" id="{BEA72303-AC2A-AA2F-B8D0-66613E4FFF40}"/>
               </a:ext>
             </a:extLst>
           </p:cNvPr>
@@ -8629,7 +8629,7 @@
                     <p:ext uri="{3AFAAA56-56D3-431D-BCD4-E75A35582382}">
                       <p173:tracksInfo xmlns:p173="http://schemas.microsoft.com/office/powerpoint/2017/3/main" displayLoc="slide">
                         <p173:trackLst>
-                          <p173:track id="{6DE9E9BD-3677-4606-B74B-A416858997B9}" label="English (captions)" lang="en-US" r:embed="rId6"/>
+                          <p173:track id="{33BF1C2C-7513-4AE0-8235-90A03A7ED8C4}" label="English (captions)" lang="en-US" r:embed="rId6"/>
                         </p173:trackLst>
                       </p173:tracksInfo>
                     </p:ext>
@@ -10000,7 +10000,7 @@
             <a:hlinkClick r:id="" action="ppaction://media"/>
             <a:extLst>
               <a:ext uri="{FF2B5EF4-FFF2-40B4-BE49-F238E27FC236}">
-                <a16:creationId xmlns:a16="http://schemas.microsoft.com/office/drawing/2014/main" id="{5ADC9B1A-E1B2-7545-D6B6-CF7A6D63D8E4}"/>
+                <a16:creationId xmlns:a16="http://schemas.microsoft.com/office/drawing/2014/main" id="{103D0889-430E-E34E-84DA-21F50D5302AE}"/>
               </a:ext>
             </a:extLst>
           </p:cNvPr>
@@ -10016,7 +10016,7 @@
                     <p:ext uri="{3AFAAA56-56D3-431D-BCD4-E75A35582382}">
                       <p173:tracksInfo xmlns:p173="http://schemas.microsoft.com/office/powerpoint/2017/3/main" displayLoc="slide">
                         <p173:trackLst>
-                          <p173:track id="{2BC368AC-0C3E-465F-837D-DC3FD8568F7D}" label="English (captions)" lang="en-US" r:embed="rId11"/>
+                          <p173:track id="{CDA2203B-FF3F-4095-B6DB-FC1E0E8CD1C7}" label="English (captions)" lang="en-US" r:embed="rId11"/>
                         </p173:trackLst>
                       </p173:tracksInfo>
                     </p:ext>
@@ -12909,7 +12909,7 @@
             <a:hlinkClick r:id="" action="ppaction://media"/>
             <a:extLst>
               <a:ext uri="{FF2B5EF4-FFF2-40B4-BE49-F238E27FC236}">
-                <a16:creationId xmlns:a16="http://schemas.microsoft.com/office/drawing/2014/main" id="{CF638969-443E-1E36-5EBC-53BEE35A9C72}"/>
+                <a16:creationId xmlns:a16="http://schemas.microsoft.com/office/drawing/2014/main" id="{81C52A84-3FEF-ED40-94BF-5A64CE888FB8}"/>
               </a:ext>
             </a:extLst>
           </p:cNvPr>
@@ -12925,7 +12925,7 @@
                     <p:ext uri="{3AFAAA56-56D3-431D-BCD4-E75A35582382}">
                       <p173:tracksInfo xmlns:p173="http://schemas.microsoft.com/office/powerpoint/2017/3/main" displayLoc="slide">
                         <p173:trackLst>
-                          <p173:track id="{D4177369-8F00-4112-A6CB-8B977DDBAB0C}" label="English (captions)" lang="en-US" r:embed="rId6"/>
+                          <p173:track id="{CEFB0970-402D-4467-9AD1-9033C373F31A}" label="English (captions)" lang="en-US" r:embed="rId6"/>
                         </p173:trackLst>
                       </p173:tracksInfo>
                     </p:ext>
@@ -13842,7 +13842,7 @@
                   </a:ext>
                 </a:extLst>
               </a:tr>
-              <a:tr h="490728">
+              <a:tr h="681228">
                 <a:tc>
                   <a:txBody>
                     <a:bodyPr/>
@@ -13996,7 +13996,7 @@
                           <a:ea typeface="Calibri" pitchFamily="34" charset="-122"/>
                           <a:cs typeface="Calibri" pitchFamily="34" charset="-120"/>
                         </a:rPr>
-                        <a:t>FedRAMP scope, STIG, active FIPS 140-3, NIAP, advisory response, 3–5 year cost</a:t>
+                        <a:t>FedRAMP scope, hardening guide, active FIPS 140-3, NIAP, advisory response, 3–5 year cost</a:t>
                       </a:r>
                       <a:endParaRPr lang="en-US" sz="1250" dirty="0">
                         <a:latin typeface="Calibri" charset="0"/>
@@ -14711,7 +14711,7 @@
             <a:hlinkClick r:id="" action="ppaction://media"/>
             <a:extLst>
               <a:ext uri="{FF2B5EF4-FFF2-40B4-BE49-F238E27FC236}">
-                <a16:creationId xmlns:a16="http://schemas.microsoft.com/office/drawing/2014/main" id="{482640F2-CE19-FFA5-62FE-74444C73B587}"/>
+                <a16:creationId xmlns:a16="http://schemas.microsoft.com/office/drawing/2014/main" id="{42DB5C04-0FE0-3430-01AE-7E0DD84F984E}"/>
               </a:ext>
             </a:extLst>
           </p:cNvPr>
@@ -14727,7 +14727,7 @@
                     <p:ext uri="{3AFAAA56-56D3-431D-BCD4-E75A35582382}">
                       <p173:tracksInfo xmlns:p173="http://schemas.microsoft.com/office/powerpoint/2017/3/main" displayLoc="slide">
                         <p173:trackLst>
-                          <p173:track id="{ED67E82F-3462-41DE-A431-71F3E4A18409}" label="English (captions)" lang="en-US" r:embed="rId7"/>
+                          <p173:track id="{4BDBEF20-7648-4F5D-B821-3D9E47B8CBD4}" label="English (captions)" lang="en-US" r:embed="rId7"/>
                         </p173:trackLst>
                       </p173:tracksInfo>
                     </p:ext>
@@ -15976,7 +15976,7 @@
             <a:hlinkClick r:id="" action="ppaction://media"/>
             <a:extLst>
               <a:ext uri="{FF2B5EF4-FFF2-40B4-BE49-F238E27FC236}">
-                <a16:creationId xmlns:a16="http://schemas.microsoft.com/office/drawing/2014/main" id="{D27D6E10-8488-3F83-B5CA-17DCA667CC46}"/>
+                <a16:creationId xmlns:a16="http://schemas.microsoft.com/office/drawing/2014/main" id="{96DB16C2-6076-AEDC-0E4B-51A8C080E17D}"/>
               </a:ext>
             </a:extLst>
           </p:cNvPr>
@@ -15992,7 +15992,7 @@
                     <p:ext uri="{3AFAAA56-56D3-431D-BCD4-E75A35582382}">
                       <p173:tracksInfo xmlns:p173="http://schemas.microsoft.com/office/powerpoint/2017/3/main" displayLoc="slide">
                         <p173:trackLst>
-                          <p173:track id="{A6827C78-517A-4F36-B51F-C50D0C42040C}" label="English (captions)" lang="en-US" r:embed="rId12"/>
+                          <p173:track id="{BD5B8734-4084-4025-B5B8-BD2F8D4CA808}" label="English (captions)" lang="en-US" r:embed="rId12"/>
                         </p173:trackLst>
                       </p173:tracksInfo>
                     </p:ext>
@@ -17977,7 +17977,7 @@
             <a:hlinkClick r:id="" action="ppaction://media"/>
             <a:extLst>
               <a:ext uri="{FF2B5EF4-FFF2-40B4-BE49-F238E27FC236}">
-                <a16:creationId xmlns:a16="http://schemas.microsoft.com/office/drawing/2014/main" id="{F247ED6C-7BA0-0E6C-4AB2-6E14ADD2950D}"/>
+                <a16:creationId xmlns:a16="http://schemas.microsoft.com/office/drawing/2014/main" id="{3B858078-9F80-A466-EA9F-EDC86BE9881D}"/>
               </a:ext>
             </a:extLst>
           </p:cNvPr>
@@ -17993,7 +17993,7 @@
                     <p:ext uri="{3AFAAA56-56D3-431D-BCD4-E75A35582382}">
                       <p173:tracksInfo xmlns:p173="http://schemas.microsoft.com/office/powerpoint/2017/3/main" displayLoc="slide">
                         <p173:trackLst>
-                          <p173:track id="{BE7107F3-51D5-410D-9305-0CB4D40B4D95}" label="English (captions)" lang="en-US" r:embed="rId6"/>
+                          <p173:track id="{F3A6E819-6425-47DD-8813-E5A7F6A15742}" label="English (captions)" lang="en-US" r:embed="rId6"/>
                         </p173:trackLst>
                       </p173:tracksInfo>
                     </p:ext>
@@ -18737,7 +18737,7 @@
             <a:hlinkClick r:id="" action="ppaction://media"/>
             <a:extLst>
               <a:ext uri="{FF2B5EF4-FFF2-40B4-BE49-F238E27FC236}">
-                <a16:creationId xmlns:a16="http://schemas.microsoft.com/office/drawing/2014/main" id="{AC1B4CEC-FA30-3FC7-1B25-E2709D9EB68F}"/>
+                <a16:creationId xmlns:a16="http://schemas.microsoft.com/office/drawing/2014/main" id="{80821BB8-DB83-4266-CDC4-EB1F96E8D934}"/>
               </a:ext>
             </a:extLst>
           </p:cNvPr>
@@ -18753,7 +18753,7 @@
                     <p:ext uri="{3AFAAA56-56D3-431D-BCD4-E75A35582382}">
                       <p173:tracksInfo xmlns:p173="http://schemas.microsoft.com/office/powerpoint/2017/3/main" displayLoc="slide">
                         <p173:trackLst>
-                          <p173:track id="{FC5989FD-C0F0-42A6-82A3-826747370426}" label="English (captions)" lang="en-US" r:embed="rId6"/>
+                          <p173:track id="{12AFE214-D82C-4311-8189-49CA9E00B398}" label="English (captions)" lang="en-US" r:embed="rId6"/>
                         </p173:trackLst>
                       </p173:tracksInfo>
                     </p:ext>
@@ -20134,7 +20134,7 @@
             <a:hlinkClick r:id="" action="ppaction://media"/>
             <a:extLst>
               <a:ext uri="{FF2B5EF4-FFF2-40B4-BE49-F238E27FC236}">
-                <a16:creationId xmlns:a16="http://schemas.microsoft.com/office/drawing/2014/main" id="{38CC53AD-52F0-8B1E-92CC-F4A401A0773B}"/>
+                <a16:creationId xmlns:a16="http://schemas.microsoft.com/office/drawing/2014/main" id="{A78C8F10-8409-0BE1-A418-4C101F1DB123}"/>
               </a:ext>
             </a:extLst>
           </p:cNvPr>
@@ -20150,7 +20150,7 @@
                     <p:ext uri="{3AFAAA56-56D3-431D-BCD4-E75A35582382}">
                       <p173:tracksInfo xmlns:p173="http://schemas.microsoft.com/office/powerpoint/2017/3/main" displayLoc="slide">
                         <p173:trackLst>
-                          <p173:track id="{D6D9B90E-A5A1-4787-9977-82F214437E21}" label="English (captions)" lang="en-US" r:embed="rId6"/>
+                          <p173:track id="{D3C88250-DA7C-4457-B9CE-20C824267368}" label="English (captions)" lang="en-US" r:embed="rId6"/>
                         </p173:trackLst>
                       </p173:tracksInfo>
                     </p:ext>
@@ -20930,7 +20930,7 @@
             <a:hlinkClick r:id="" action="ppaction://media"/>
             <a:extLst>
               <a:ext uri="{FF2B5EF4-FFF2-40B4-BE49-F238E27FC236}">
-                <a16:creationId xmlns:a16="http://schemas.microsoft.com/office/drawing/2014/main" id="{09F3A2E8-EE9D-095B-0DD1-6A21DA46227C}"/>
+                <a16:creationId xmlns:a16="http://schemas.microsoft.com/office/drawing/2014/main" id="{A1F643AD-60A6-1544-61B0-80B35A5AD0E1}"/>
               </a:ext>
             </a:extLst>
           </p:cNvPr>
@@ -20946,7 +20946,7 @@
                     <p:ext uri="{3AFAAA56-56D3-431D-BCD4-E75A35582382}">
                       <p173:tracksInfo xmlns:p173="http://schemas.microsoft.com/office/powerpoint/2017/3/main" displayLoc="slide">
                         <p173:trackLst>
-                          <p173:track id="{CF86B3D9-498E-4023-B2F0-0B2C328680D5}" label="English (captions)" lang="en-US" r:embed="rId6"/>
+                          <p173:track id="{C9BA6742-B6E2-49B5-BCE5-2B3F5D5A6189}" label="English (captions)" lang="en-US" r:embed="rId6"/>
                         </p173:trackLst>
                       </p173:tracksInfo>
                     </p:ext>
@@ -21690,7 +21690,7 @@
             <a:hlinkClick r:id="" action="ppaction://media"/>
             <a:extLst>
               <a:ext uri="{FF2B5EF4-FFF2-40B4-BE49-F238E27FC236}">
-                <a16:creationId xmlns:a16="http://schemas.microsoft.com/office/drawing/2014/main" id="{642E938A-41D7-A687-9651-DDEF2092CCF1}"/>
+                <a16:creationId xmlns:a16="http://schemas.microsoft.com/office/drawing/2014/main" id="{8ABE77E9-EDE6-7AB1-985C-A41A0D2824BE}"/>
               </a:ext>
             </a:extLst>
           </p:cNvPr>
@@ -21706,7 +21706,7 @@
                     <p:ext uri="{3AFAAA56-56D3-431D-BCD4-E75A35582382}">
                       <p173:tracksInfo xmlns:p173="http://schemas.microsoft.com/office/powerpoint/2017/3/main" displayLoc="slide">
                         <p173:trackLst>
-                          <p173:track id="{C7871FE3-55A6-468D-8833-2A47F4162500}" label="English (captions)" lang="en-US" r:embed="rId6"/>
+                          <p173:track id="{D5E6FE62-B4DF-44A8-AAF6-841EB6BA5697}" label="English (captions)" lang="en-US" r:embed="rId6"/>
                         </p173:trackLst>
                       </p173:tracksInfo>
                     </p:ext>
@@ -22387,7 +22387,7 @@
                   <a:srgbClr val="1F2A44"/>
                 </a:solidFill>
               </a:rPr>
-              <a:t>DISA STIG</a:t>
+              <a:t>Hardening guide</a:t>
             </a:r>
             <a:endParaRPr lang="en-US" sz="1250" dirty="0"/>
           </a:p>
@@ -22423,7 +22423,7 @@
                   <a:schemeClr val="tx2"/>
                 </a:solidFill>
               </a:rPr>
-              <a:t>A vendor-specific STIG, or only the generic DNS SRG</a:t>
+              <a:t>A CIS Benchmark, vendor guide or NCP checklist; DISA STIG is High only</a:t>
             </a:r>
             <a:endParaRPr lang="en-US" sz="1250" dirty="0"/>
           </a:p>
@@ -23224,7 +23224,7 @@
                   <a:srgbClr val="64748B"/>
                 </a:solidFill>
               </a:rPr>
-              <a:t>Sources: FedRAMP Consolidated Rules for 2026 and Marketplace; NIST CMVP and FIPS 140-3 transition; NIAP PCL; DISA STIG file store; CISA CDM APL and KEV; Azure prices. Book 08, Chapters 03 and 12.</a:t>
+              <a:t>Sources: FedRAMP Rules and Marketplace; NIST CMVP; NIAP PCL; CIS Benchmarks; NIST NCP; DISA STIGs (High only); CISA CDM APL and KEV; Azure prices. Book 08, Ch. 03, 12.</a:t>
             </a:r>
             <a:endParaRPr lang="en-US" sz="1000" dirty="0"/>
           </a:p>
@@ -23281,7 +23281,7 @@
             <a:hlinkClick r:id="" action="ppaction://media"/>
             <a:extLst>
               <a:ext uri="{FF2B5EF4-FFF2-40B4-BE49-F238E27FC236}">
-                <a16:creationId xmlns:a16="http://schemas.microsoft.com/office/drawing/2014/main" id="{6F3ED002-489C-D3BA-67DA-CD36CE35FF6C}"/>
+                <a16:creationId xmlns:a16="http://schemas.microsoft.com/office/drawing/2014/main" id="{A342558C-410E-703E-5613-8EA5AD8E2297}"/>
               </a:ext>
             </a:extLst>
           </p:cNvPr>
@@ -23297,7 +23297,7 @@
                     <p:ext uri="{3AFAAA56-56D3-431D-BCD4-E75A35582382}">
                       <p173:tracksInfo xmlns:p173="http://schemas.microsoft.com/office/powerpoint/2017/3/main" displayLoc="slide">
                         <p173:trackLst>
-                          <p173:track id="{CD053D9A-1E82-4674-BB80-027F29280453}" label="English (captions)" lang="en-US" r:embed="rId6"/>
+                          <p173:track id="{F1A4619A-0C6A-4341-B9B1-732E1BA3C8ED}" label="English (captions)" lang="en-US" r:embed="rId6"/>
                         </p173:trackLst>
                       </p173:tracksInfo>
                     </p:ext>
@@ -23330,10 +23330,10 @@
   </p:clrMapOvr>
   <mc:AlternateContent xmlns:mc="http://schemas.openxmlformats.org/markup-compatibility/2006">
     <mc:Choice xmlns:p14="http://schemas.microsoft.com/office/powerpoint/2010/main" Requires="p14">
-      <p:transition spd="slow" p14:dur="2000" advTm="50730"/>
+      <p:transition spd="slow" p14:dur="2000" advTm="61100"/>
     </mc:Choice>
     <mc:Fallback>
-      <p:transition spd="slow" advTm="50730"/>
+      <p:transition spd="slow" advTm="61100"/>
     </mc:Fallback>
   </mc:AlternateContent>
   <p:timing>
@@ -23367,7 +23367,7 @@
                                   <p:childTnLst>
                                     <p:cmd type="call" cmd="playFrom(0.0)">
                                       <p:cBhvr>
-                                        <p:cTn id="6" dur="46728" fill="hold"/>
+                                        <p:cTn id="6" dur="57096" fill="hold"/>
                                         <p:tgtEl>
                                           <p:spTgt spid="38"/>
                                         </p:tgtEl>
@@ -24307,7 +24307,7 @@
                           <a:ea typeface="Calibri" pitchFamily="34" charset="-122"/>
                           <a:cs typeface="Calibri" pitchFamily="34" charset="-120"/>
                         </a:rPr>
-                        <a:t>Vendor-specific DISA STIG</a:t>
+                        <a:t>DISA STIG (High only)</a:t>
                       </a:r>
                       <a:endParaRPr lang="en-US" sz="1200" dirty="0">
                         <a:latin typeface="Calibri" charset="0"/>
@@ -24375,7 +24375,7 @@
                           <a:ea typeface="Calibri" pitchFamily="34" charset="-122"/>
                           <a:cs typeface="Calibri" pitchFamily="34" charset="-120"/>
                         </a:rPr>
-                        <a:t>NIOS 9.x V1R1 (2026); Infoblox 8.x DNS V1R4</a:t>
+                        <a:t>NIOS 9.x V1R1 (2026); Infoblox 8.x DNS V1R4; no CIS Benchmark</a:t>
                       </a:r>
                       <a:endParaRPr lang="en-US" sz="1200" dirty="0">
                         <a:latin typeface="Calibri" charset="0"/>
@@ -25856,7 +25856,7 @@
                   <a:srgbClr val="64748B"/>
                 </a:solidFill>
               </a:rPr>
-              <a:t>Sources: FedRAMP products.json; NIST CMVP certificates and Modules In Process list; NIAP PCL; Common Criteria Portal; DISA STIG file store; CISA CDM APL (April 2025). All checked Oct. 22, 2026. Book 08, Ch. 12.</a:t>
+              <a:t>Sources: FedRAMP products.json; NIST CMVP certificates and Modules In Process list; NIAP PCL; CC Portal; DISA STIG store (High only); CIS list (Oct. 29); CISA CDM APL (April 2025). Checked Oct. 22, 2026. Book 08, Ch. 12.</a:t>
             </a:r>
             <a:endParaRPr lang="en-US" sz="1000" dirty="0"/>
           </a:p>
@@ -25913,7 +25913,7 @@
             <a:hlinkClick r:id="" action="ppaction://media"/>
             <a:extLst>
               <a:ext uri="{FF2B5EF4-FFF2-40B4-BE49-F238E27FC236}">
-                <a16:creationId xmlns:a16="http://schemas.microsoft.com/office/drawing/2014/main" id="{C865114D-EDB9-8052-F707-A6F8DF68363E}"/>
+                <a16:creationId xmlns:a16="http://schemas.microsoft.com/office/drawing/2014/main" id="{B2FE5B1A-094B-5BFD-D8FA-4CA0C6DAFAB9}"/>
               </a:ext>
             </a:extLst>
           </p:cNvPr>
@@ -25929,7 +25929,7 @@
                     <p:ext uri="{3AFAAA56-56D3-431D-BCD4-E75A35582382}">
                       <p173:tracksInfo xmlns:p173="http://schemas.microsoft.com/office/powerpoint/2017/3/main" displayLoc="slide">
                         <p173:trackLst>
-                          <p173:track id="{F915E360-D1AA-4ACD-86D6-AD0E8C577A46}" label="English (captions)" lang="en-US" r:embed="rId7"/>
+                          <p173:track id="{AB42BF05-C70C-42D3-8CC8-D3EDB87ADB04}" label="English (captions)" lang="en-US" r:embed="rId7"/>
                         </p173:trackLst>
                       </p173:tracksInfo>
                     </p:ext>
@@ -25962,10 +25962,10 @@
   </p:clrMapOvr>
   <mc:AlternateContent xmlns:mc="http://schemas.openxmlformats.org/markup-compatibility/2006">
     <mc:Choice xmlns:p14="http://schemas.microsoft.com/office/powerpoint/2010/main" Requires="p14">
-      <p:transition spd="slow" p14:dur="2000" advTm="49940"/>
+      <p:transition spd="slow" p14:dur="2000" advTm="51830"/>
     </mc:Choice>
     <mc:Fallback>
-      <p:transition spd="slow" advTm="49940"/>
+      <p:transition spd="slow" advTm="51830"/>
     </mc:Fallback>
   </mc:AlternateContent>
   <p:timing>
@@ -25999,7 +25999,7 @@
                                   <p:childTnLst>
                                     <p:cmd type="call" cmd="playFrom(0.0)">
                                       <p:cBhvr>
-                                        <p:cTn id="6" dur="45936" fill="hold"/>
+                                        <p:cTn id="6" dur="47832" fill="hold"/>
                                         <p:tgtEl>
                                           <p:spTgt spid="11"/>
                                         </p:tgtEl>
